--- a/website/public/generated/Suez-Tunnel/06_samco_pco_27_pro_cad_27_contract_administration.pptx
+++ b/website/public/generated/Suez-Tunnel/06_samco_pco_27_pro_cad_27_contract_administration.pptx
@@ -3162,7 +3162,7 @@
               </a:defRPr>
             </a:pPr>
             <a:r>
-              <a:t>Suez Tunnel Civil &amp; MEP Works | 1 data-driven control section | 2026-08-14T03:05:41+00:00</a:t>
+              <a:t>Suez Tunnel Civil &amp; MEP Works | 1 data-driven control section | 2026-08-15T05:31:08+00:00</a:t>
             </a:r>
           </a:p>
         </p:txBody>
